--- a/線上聊天室.pptx
+++ b/線上聊天室.pptx
@@ -232,7 +232,7 @@
           <a:p>
             <a:fld id="{C99CF209-FA79-4DCF-8C0F-8EA14DA76F16}" type="datetimeFigureOut">
               <a:rPr lang="en-US" smtClean="0"/>
-              <a:t>12/26/2019</a:t>
+              <a:t>5/6/2020</a:t>
             </a:fld>
             <a:endParaRPr lang="en-US"/>
           </a:p>
@@ -409,7 +409,7 @@
           <a:p>
             <a:fld id="{2C673C5F-B233-4C10-BD1F-6656AE954080}" type="datetimeFigureOut">
               <a:rPr lang="en-US" smtClean="0"/>
-              <a:t>12/26/2019</a:t>
+              <a:t>5/6/2020</a:t>
             </a:fld>
             <a:endParaRPr lang="en-US"/>
           </a:p>
@@ -823,7 +823,7 @@
           <a:p>
             <a:fld id="{282D2CE2-DBF4-4778-A9FE-D72F359E7185}" type="datetimeFigureOut">
               <a:rPr lang="en-US" smtClean="0"/>
-              <a:t>12/26/2019</a:t>
+              <a:t>5/6/2020</a:t>
             </a:fld>
             <a:endParaRPr lang="en-US"/>
           </a:p>
@@ -1021,7 +1021,7 @@
           <a:p>
             <a:fld id="{282D2CE2-DBF4-4778-A9FE-D72F359E7185}" type="datetimeFigureOut">
               <a:rPr lang="en-US" smtClean="0"/>
-              <a:t>12/26/2019</a:t>
+              <a:t>5/6/2020</a:t>
             </a:fld>
             <a:endParaRPr lang="en-US"/>
           </a:p>
@@ -1229,7 +1229,7 @@
           <a:p>
             <a:fld id="{282D2CE2-DBF4-4778-A9FE-D72F359E7185}" type="datetimeFigureOut">
               <a:rPr lang="en-US" smtClean="0"/>
-              <a:t>12/26/2019</a:t>
+              <a:t>5/6/2020</a:t>
             </a:fld>
             <a:endParaRPr lang="en-US"/>
           </a:p>
@@ -1427,7 +1427,7 @@
           <a:p>
             <a:fld id="{282D2CE2-DBF4-4778-A9FE-D72F359E7185}" type="datetimeFigureOut">
               <a:rPr lang="en-US" smtClean="0"/>
-              <a:t>12/26/2019</a:t>
+              <a:t>5/6/2020</a:t>
             </a:fld>
             <a:endParaRPr lang="en-US"/>
           </a:p>
@@ -1702,7 +1702,7 @@
           <a:p>
             <a:fld id="{282D2CE2-DBF4-4778-A9FE-D72F359E7185}" type="datetimeFigureOut">
               <a:rPr lang="en-US" smtClean="0"/>
-              <a:t>12/26/2019</a:t>
+              <a:t>5/6/2020</a:t>
             </a:fld>
             <a:endParaRPr lang="en-US"/>
           </a:p>
@@ -1967,7 +1967,7 @@
           <a:p>
             <a:fld id="{282D2CE2-DBF4-4778-A9FE-D72F359E7185}" type="datetimeFigureOut">
               <a:rPr lang="en-US" smtClean="0"/>
-              <a:t>12/26/2019</a:t>
+              <a:t>5/6/2020</a:t>
             </a:fld>
             <a:endParaRPr lang="en-US"/>
           </a:p>
@@ -2379,7 +2379,7 @@
           <a:p>
             <a:fld id="{282D2CE2-DBF4-4778-A9FE-D72F359E7185}" type="datetimeFigureOut">
               <a:rPr lang="en-US" smtClean="0"/>
-              <a:t>12/26/2019</a:t>
+              <a:t>5/6/2020</a:t>
             </a:fld>
             <a:endParaRPr lang="en-US"/>
           </a:p>
@@ -2520,7 +2520,7 @@
           <a:p>
             <a:fld id="{282D2CE2-DBF4-4778-A9FE-D72F359E7185}" type="datetimeFigureOut">
               <a:rPr lang="en-US" smtClean="0"/>
-              <a:t>12/26/2019</a:t>
+              <a:t>5/6/2020</a:t>
             </a:fld>
             <a:endParaRPr lang="en-US"/>
           </a:p>
@@ -2633,7 +2633,7 @@
           <a:p>
             <a:fld id="{282D2CE2-DBF4-4778-A9FE-D72F359E7185}" type="datetimeFigureOut">
               <a:rPr lang="en-US" smtClean="0"/>
-              <a:t>12/26/2019</a:t>
+              <a:t>5/6/2020</a:t>
             </a:fld>
             <a:endParaRPr lang="en-US"/>
           </a:p>
@@ -2944,7 +2944,7 @@
           <a:p>
             <a:fld id="{282D2CE2-DBF4-4778-A9FE-D72F359E7185}" type="datetimeFigureOut">
               <a:rPr lang="en-US" smtClean="0"/>
-              <a:t>12/26/2019</a:t>
+              <a:t>5/6/2020</a:t>
             </a:fld>
             <a:endParaRPr lang="en-US"/>
           </a:p>
@@ -3232,7 +3232,7 @@
           <a:p>
             <a:fld id="{282D2CE2-DBF4-4778-A9FE-D72F359E7185}" type="datetimeFigureOut">
               <a:rPr lang="en-US" smtClean="0"/>
-              <a:t>12/26/2019</a:t>
+              <a:t>5/6/2020</a:t>
             </a:fld>
             <a:endParaRPr lang="en-US"/>
           </a:p>
@@ -3473,7 +3473,7 @@
           <a:p>
             <a:fld id="{282D2CE2-DBF4-4778-A9FE-D72F359E7185}" type="datetimeFigureOut">
               <a:rPr lang="en-US" smtClean="0"/>
-              <a:t>12/26/2019</a:t>
+              <a:t>5/6/2020</a:t>
             </a:fld>
             <a:endParaRPr lang="en-US"/>
           </a:p>
@@ -4059,60 +4059,18 @@
           <a:p>
             <a:pPr algn="l"/>
             <a:r>
-              <a:rPr lang="zh-CN" altLang="en-US" sz="2200">
-                <a:latin typeface="+mn-ea"/>
-              </a:rPr>
-              <a:t>組員：</a:t>
-            </a:r>
-            <a:endParaRPr lang="en-US" altLang="zh-CN" sz="2200">
-              <a:latin typeface="+mn-ea"/>
-            </a:endParaRPr>
-          </a:p>
-          <a:p>
-            <a:pPr algn="l"/>
-            <a:r>
-              <a:rPr lang="zh-CN" altLang="en-US" sz="2200">
-                <a:latin typeface="+mn-ea"/>
-              </a:rPr>
-              <a:t>徐亦華 </a:t>
-            </a:r>
-            <a:r>
-              <a:rPr lang="en-US" altLang="zh-CN" sz="2200">
-                <a:latin typeface="+mn-ea"/>
-              </a:rPr>
-              <a:t>B064011002</a:t>
-            </a:r>
-          </a:p>
-          <a:p>
-            <a:pPr algn="l"/>
-            <a:r>
-              <a:rPr lang="zh-CN" altLang="en-US" sz="2200">
-                <a:latin typeface="+mn-ea"/>
-              </a:rPr>
-              <a:t>朱博雍 </a:t>
-            </a:r>
-            <a:r>
-              <a:rPr lang="en-US" altLang="zh-CN" sz="2200">
-                <a:latin typeface="+mn-ea"/>
-              </a:rPr>
-              <a:t>B064020019</a:t>
-            </a:r>
-          </a:p>
-          <a:p>
-            <a:pPr algn="l"/>
-            <a:r>
-              <a:rPr lang="zh-CN" altLang="en-US" sz="2200">
+              <a:rPr lang="zh-CN" altLang="en-US" sz="2200" dirty="0">
                 <a:latin typeface="+mn-ea"/>
               </a:rPr>
               <a:t>呂子恩 </a:t>
             </a:r>
             <a:r>
-              <a:rPr lang="en-US" altLang="zh-CN" sz="2200">
+              <a:rPr lang="en-US" altLang="zh-CN" sz="2200" dirty="0">
                 <a:latin typeface="+mn-ea"/>
               </a:rPr>
               <a:t>B064020051</a:t>
             </a:r>
-            <a:endParaRPr lang="en-US" sz="2200">
+            <a:endParaRPr lang="en-US" sz="2200" dirty="0">
               <a:latin typeface="+mn-ea"/>
             </a:endParaRPr>
           </a:p>
